--- a/cursos/recursos/aperturas-y-defensas/13-como-elegir-un-repertorio-segun-tu-estilo.pptx
+++ b/cursos/recursos/aperturas-y-defensas/13-como-elegir-un-repertorio-segun-tu-estilo.pptx
@@ -1650,7 +1650,7 @@
                 <a:ea typeface="Calibri" pitchFamily="34" charset="-122"/>
                 <a:cs typeface="Calibri" pitchFamily="34" charset="-120"/>
               </a:rPr>
-              <a:t>Si prefieres la planificación a largo plazo, 1.d4 o 1.Nf3 con estructuras sólidas encajan más con tu estilo.</a:t>
+              <a:t>Si prefieres la planificación a largo plazo, 1.d4 o 1.Cf3 con estructuras sólidas encajan más con tu estilo.</a:t>
             </a:r>
             <a:endParaRPr lang="en-US" sz="1600" dirty="0"/>
           </a:p>
